--- a/Courses/Software-Sciences/IT-Module-3-Web-Design/01-Websites/01-Websites.pptx
+++ b/Courses/Software-Sciences/IT-Module-3-Web-Design/01-Websites/01-Websites.pptx
@@ -364,7 +364,7 @@
           <a:p>
             <a:fld id="{4E087215-0C8F-4762-A664-737A353EC9A4}" type="datetimeFigureOut">
               <a:rPr lang="bg-BG" smtClean="0"/>
-              <a:t>19.11.25 г.</a:t>
+              <a:t>4.09.26 г.</a:t>
             </a:fld>
             <a:endParaRPr lang="bg-BG"/>
           </a:p>
@@ -560,7 +560,7 @@
           <a:p>
             <a:fld id="{72D84649-876A-46C9-8472-14CB09C070D8}" type="datetimeFigureOut">
               <a:rPr lang="en-US" smtClean="0"/>
-              <a:t>11/19/25</a:t>
+              <a:t>9/4/26</a:t>
             </a:fld>
             <a:endParaRPr lang="en-US"/>
           </a:p>
@@ -12060,8 +12060,8 @@
         </p:blipFill>
         <p:spPr>
           <a:xfrm>
-            <a:off x="611007" y="3056137"/>
-            <a:ext cx="1819960" cy="849053"/>
+            <a:off x="611007" y="3073413"/>
+            <a:ext cx="1819960" cy="814500"/>
           </a:xfrm>
           <a:prstGeom prst="rect">
             <a:avLst/>
